--- a/downloads/线性回归与逻辑回归_PPT大纲.pptx
+++ b/downloads/线性回归与逻辑回归_PPT大纲.pptx
@@ -463,31 +463,19 @@
               <a:t>时间段：00:00 至 00:45</a:t>
             </a:r>
           </a:p>
-          <a:p xmlns:a="http://schemas.openxmlformats.org/drawingml/2006/main">
-            <a:r>
-              <a:t/>
-            </a:r>
-          </a:p>
-          <a:p xmlns:a="http://schemas.openxmlformats.org/drawingml/2006/main">
-            <a:r>
-              <a:t>大家好，我们小组今天介绍线性回归和逻辑回归。先看一个熟悉的场景：如果知道一名同学的学习时长，我们能不能预测他的考试分数？如果问题换成，他这次能不能通过考试，模型又该怎样变化？前一个问题要回答一个数值，后一个问题要回答一个类别。我们会沿着这两个问题，把模型、训练和评价串起来。今天所有学生数据都由程序模拟，只用于理解算法，不能据此推断真实的学习效果，更不能给同学贴标签。</a:t>
-            </a:r>
-          </a:p>
-          <a:p xmlns:a="http://schemas.openxmlformats.org/drawingml/2006/main">
-            <a:r>
-              <a:t/>
-            </a:r>
-          </a:p>
+          <a:p xmlns:a="http://schemas.openxmlformats.org/drawingml/2006/main"/>
+          <a:p xmlns:a="http://schemas.openxmlformats.org/drawingml/2006/main">
+            <a:r>
+              <a:t>大家好，我们小组今天介绍经典机器学习算法里的线性回归和逻辑回归。先看一个熟悉的场景：如果知道一名同学的学习时长，我们能不能预测他的考试分数？如果问题换成，他这次能不能通过考试，模型又该怎样变化？前一个问题要回答一个数值，后一个问题要回答一个类别。我们会沿着这两个问题，把模型、训练和评价串起来。今天所有学生数据都由程序模拟，只用于理解算法，不能据此推断真实的学习效果，更不能给同学贴标签。</a:t>
+            </a:r>
+          </a:p>
+          <a:p xmlns:a="http://schemas.openxmlformats.org/drawingml/2006/main"/>
           <a:p xmlns:a="http://schemas.openxmlformats.org/drawingml/2006/main">
             <a:r>
               <a:t>演示与转场：停留在两张问题卡上，强调“数值”和“类别”；不先展示公式。</a:t>
             </a:r>
           </a:p>
-          <a:p xmlns:a="http://schemas.openxmlformats.org/drawingml/2006/main">
-            <a:r>
-              <a:t/>
-            </a:r>
-          </a:p>
+          <a:p xmlns:a="http://schemas.openxmlformats.org/drawingml/2006/main"/>
           <a:p xmlns:a="http://schemas.openxmlformats.org/drawingml/2006/main">
             <a:r>
               <a:t>参考资料：</a:t>
@@ -923,31 +911,19 @@
               <a:t>时间段：15:50 至 16:50</a:t>
             </a:r>
           </a:p>
-          <a:p xmlns:a="http://schemas.openxmlformats.org/drawingml/2006/main">
-            <a:r>
-              <a:t/>
-            </a:r>
-          </a:p>
-          <a:p xmlns:a="http://schemas.openxmlformats.org/drawingml/2006/main">
-            <a:r>
-              <a:t>把两种算法放在一起，共同点很清楚：它们都从特征的线性加权出发，都需要通过数据学习参数。主要区别在输出和目标。线性回归直接预测连续数值，常用均方误差训练；逻辑回归先预测类别概率，常用交叉熵训练，再用阈值得到类别。它们计算和解释相对方便，适合作为建模的起点，但也有边界。线性回归可能受到异常点影响，超出数据范围的外推要谨慎；逻辑回归在原始特征中通常只能给出线性边界，输出概率也需要检验。是否增加特征、加入正则化，或者换更复杂的模型，应该由验证结果支持，而不是根据算法名字是否高级来决定。</a:t>
-            </a:r>
-          </a:p>
-          <a:p xmlns:a="http://schemas.openxmlformats.org/drawingml/2006/main">
-            <a:r>
-              <a:t/>
-            </a:r>
-          </a:p>
+          <a:p xmlns:a="http://schemas.openxmlformats.org/drawingml/2006/main"/>
+          <a:p xmlns:a="http://schemas.openxmlformats.org/drawingml/2006/main">
+            <a:r>
+              <a:t>把两种算法放回经典机器学习里看，共同点很清楚：它们都是监督学习，都从特征的线性加权出发，都需要通过数据学习参数。主要区别在输出和目标。线性回归直接预测连续数值，常用均方误差训练；逻辑回归先预测类别概率，常用交叉熵训练，再用阈值得到类别。它们计算和解释相对方便，适合作为建模的起点，但也有边界。线性回归可能受到异常点影响，超出数据范围的外推要谨慎；逻辑回归在原始特征中通常只能给出线性边界，输出概率也需要检验。是否增加特征、加入正则化，或者换更复杂的模型，应该由验证结果支持，而不是根据算法名字是否高级来决定。</a:t>
+            </a:r>
+          </a:p>
+          <a:p xmlns:a="http://schemas.openxmlformats.org/drawingml/2006/main"/>
           <a:p xmlns:a="http://schemas.openxmlformats.org/drawingml/2006/main">
             <a:r>
               <a:t>演示与转场：按“共同点→核心不同→何时不够用”读表，不逐字朗读整张表。</a:t>
             </a:r>
           </a:p>
-          <a:p xmlns:a="http://schemas.openxmlformats.org/drawingml/2006/main">
-            <a:r>
-              <a:t/>
-            </a:r>
-          </a:p>
+          <a:p xmlns:a="http://schemas.openxmlformats.org/drawingml/2006/main"/>
           <a:p xmlns:a="http://schemas.openxmlformats.org/drawingml/2006/main">
             <a:r>
               <a:t>参考资料：</a:t>
@@ -2767,7 +2743,7 @@
           <a:lstStyle xmlns:a="http://schemas.openxmlformats.org/drawingml/2006/main"/>
           <a:p xmlns:a="http://schemas.openxmlformats.org/drawingml/2006/main">
             <a:pPr algn="l">
-              <a:defRPr sz="2025" b="0">
+              <a:defRPr sz="1400" b="0">
                 <a:solidFill>
                   <a:srgbClr val="263E57"/>
                 </a:solidFill>
@@ -2777,15 +2753,7 @@
               </a:defRPr>
             </a:pPr>
             <a:r>
-              <a:rPr sz="2025" b="0">
-                <a:solidFill>
-                  <a:srgbClr val="263E57"/>
-                </a:solidFill>
-                <a:latin typeface="Microsoft YaHei"/>
-                <a:ea typeface="Microsoft YaHei"/>
-                <a:cs typeface="Microsoft YaHei"/>
-              </a:rPr>
-              <a:t>用同一个场景区分连续数值预测与二分类，明确本次汇报主线。</a:t>
+              <a:t>用同一个场景区分连续数值预测与二分类，点明二者都是经典监督学习里的线性基线。</a:t>
             </a:r>
           </a:p>
         </p:txBody>
@@ -3052,7 +3020,7 @@
           <a:lstStyle xmlns:a="http://schemas.openxmlformats.org/drawingml/2006/main"/>
           <a:p xmlns:a="http://schemas.openxmlformats.org/drawingml/2006/main">
             <a:pPr algn="l">
-              <a:defRPr sz="1725" b="1">
+              <a:defRPr sz="1200" b="1">
                 <a:solidFill>
                   <a:srgbClr val="087D88"/>
                 </a:solidFill>
@@ -3062,15 +3030,7 @@
               </a:defRPr>
             </a:pPr>
             <a:r>
-              <a:rPr sz="1725" b="1">
-                <a:solidFill>
-                  <a:srgbClr val="087D88"/>
-                </a:solidFill>
-                <a:latin typeface="Microsoft YaHei"/>
-                <a:ea typeface="Microsoft YaHei"/>
-                <a:cs typeface="Microsoft YaHei"/>
-              </a:rPr>
-              <a:t>后续配图建议</a:t>
+              <a:t>本页要点</a:t>
             </a:r>
           </a:p>
         </p:txBody>
@@ -3109,94 +3069,56 @@
           <a:lstStyle xmlns:a="http://schemas.openxmlformats.org/drawingml/2006/main"/>
           <a:p xmlns:a="http://schemas.openxmlformats.org/drawingml/2006/main">
             <a:pPr algn="l">
-              <a:defRPr sz="1875" b="0">
-                <a:solidFill>
-                  <a:srgbClr val="63788D"/>
-                </a:solidFill>
-                <a:latin typeface="Microsoft YaHei"/>
-                <a:ea typeface="Microsoft YaHei"/>
-                <a:cs typeface="Microsoft YaHei"/>
-              </a:defRPr>
-            </a:pPr>
-            <a:r>
-              <a:rPr sz="1875" b="0">
-                <a:solidFill>
-                  <a:srgbClr val="63788D"/>
-                </a:solidFill>
-                <a:latin typeface="Microsoft YaHei"/>
-                <a:ea typeface="Microsoft YaHei"/>
-                <a:cs typeface="Microsoft YaHei"/>
-              </a:rPr>
-              <a:t>待补：同一张教学模拟学生数据</a:t>
-            </a:r>
-          </a:p>
-          <a:p xmlns:a="http://schemas.openxmlformats.org/drawingml/2006/main">
-            <a:pPr algn="l">
-              <a:defRPr sz="1875" b="0">
-                <a:solidFill>
-                  <a:srgbClr val="63788D"/>
-                </a:solidFill>
-                <a:latin typeface="Microsoft YaHei"/>
-                <a:ea typeface="Microsoft YaHei"/>
-                <a:cs typeface="Microsoft YaHei"/>
-              </a:defRPr>
-            </a:pPr>
-            <a:r>
-              <a:rPr sz="1875" b="0">
-                <a:solidFill>
-                  <a:srgbClr val="63788D"/>
-                </a:solidFill>
-                <a:latin typeface="Microsoft YaHei"/>
-                <a:ea typeface="Microsoft YaHei"/>
-                <a:cs typeface="Microsoft YaHei"/>
-              </a:rPr>
-              <a:t>卡，分成“预测分数”和“预测</a:t>
-            </a:r>
-          </a:p>
-          <a:p xmlns:a="http://schemas.openxmlformats.org/drawingml/2006/main">
-            <a:pPr algn="l">
-              <a:defRPr sz="1875" b="0">
-                <a:solidFill>
-                  <a:srgbClr val="63788D"/>
-                </a:solidFill>
-                <a:latin typeface="Microsoft YaHei"/>
-                <a:ea typeface="Microsoft YaHei"/>
-                <a:cs typeface="Microsoft YaHei"/>
-              </a:defRPr>
-            </a:pPr>
-            <a:r>
-              <a:rPr sz="1875" b="0">
-                <a:solidFill>
-                  <a:srgbClr val="63788D"/>
-                </a:solidFill>
-                <a:latin typeface="Microsoft YaHei"/>
-                <a:ea typeface="Microsoft YaHei"/>
-                <a:cs typeface="Microsoft YaHei"/>
-              </a:rPr>
-              <a:t>通过概率”两条分支；页脚注明</a:t>
-            </a:r>
-          </a:p>
-          <a:p xmlns:a="http://schemas.openxmlformats.org/drawingml/2006/main">
-            <a:pPr algn="l">
-              <a:defRPr sz="1875" b="0">
-                <a:solidFill>
-                  <a:srgbClr val="63788D"/>
-                </a:solidFill>
-                <a:latin typeface="Microsoft YaHei"/>
-                <a:ea typeface="Microsoft YaHei"/>
-                <a:cs typeface="Microsoft YaHei"/>
-              </a:defRPr>
-            </a:pPr>
-            <a:r>
-              <a:rPr sz="1875" b="0">
-                <a:solidFill>
-                  <a:srgbClr val="63788D"/>
-                </a:solidFill>
-                <a:latin typeface="Microsoft YaHei"/>
-                <a:ea typeface="Microsoft YaHei"/>
-                <a:cs typeface="Microsoft YaHei"/>
-              </a:rPr>
-              <a:t>教学模拟，非真实教育规律。</a:t>
+              <a:defRPr sz="1300" b="0">
+                <a:solidFill>
+                  <a:srgbClr val="152139"/>
+                </a:solidFill>
+                <a:latin typeface="Microsoft YaHei"/>
+                <a:ea typeface="Microsoft YaHei"/>
+                <a:cs typeface="Microsoft YaHei"/>
+              </a:defRPr>
+            </a:pPr>
+            <a:r>
+              <a:t>同一输入：学习时长</a:t>
+            </a:r>
+          </a:p>
+          <a:p xmlns:a="http://schemas.openxmlformats.org/drawingml/2006/main">
+            <a:pPr>
+              <a:defRPr sz="1300">
+                <a:solidFill>
+                  <a:srgbClr val="152139"/>
+                </a:solidFill>
+                <a:latin typeface="Microsoft YaHei"/>
+              </a:defRPr>
+            </a:pPr>
+            <a:r>
+              <a:t>左：预测分数 → 线性回归</a:t>
+            </a:r>
+          </a:p>
+          <a:p xmlns:a="http://schemas.openxmlformats.org/drawingml/2006/main">
+            <a:pPr>
+              <a:defRPr sz="1300">
+                <a:solidFill>
+                  <a:srgbClr val="152139"/>
+                </a:solidFill>
+                <a:latin typeface="Microsoft YaHei"/>
+              </a:defRPr>
+            </a:pPr>
+            <a:r>
+              <a:t>右：预测是否通过 → 逻辑回归</a:t>
+            </a:r>
+          </a:p>
+          <a:p xmlns:a="http://schemas.openxmlformats.org/drawingml/2006/main">
+            <a:pPr>
+              <a:defRPr sz="1300">
+                <a:solidFill>
+                  <a:srgbClr val="152139"/>
+                </a:solidFill>
+                <a:latin typeface="Microsoft YaHei"/>
+              </a:defRPr>
+            </a:pPr>
+            <a:r>
+              <a:t>数据为教学模拟，非因果</a:t>
             </a:r>
           </a:p>
         </p:txBody>
@@ -3777,7 +3699,7 @@
           <a:lstStyle xmlns:a="http://schemas.openxmlformats.org/drawingml/2006/main"/>
           <a:p xmlns:a="http://schemas.openxmlformats.org/drawingml/2006/main">
             <a:pPr algn="l">
-              <a:defRPr sz="1725" b="1">
+              <a:defRPr sz="1200" b="1">
                 <a:solidFill>
                   <a:srgbClr val="087D88"/>
                 </a:solidFill>
@@ -3787,15 +3709,7 @@
               </a:defRPr>
             </a:pPr>
             <a:r>
-              <a:rPr sz="1725" b="1">
-                <a:solidFill>
-                  <a:srgbClr val="087D88"/>
-                </a:solidFill>
-                <a:latin typeface="Microsoft YaHei"/>
-                <a:ea typeface="Microsoft YaHei"/>
-                <a:cs typeface="Microsoft YaHei"/>
-              </a:rPr>
-              <a:t>后续配图建议</a:t>
+              <a:t>本页要点</a:t>
             </a:r>
           </a:p>
         </p:txBody>
@@ -3834,94 +3748,56 @@
           <a:lstStyle xmlns:a="http://schemas.openxmlformats.org/drawingml/2006/main"/>
           <a:p xmlns:a="http://schemas.openxmlformats.org/drawingml/2006/main">
             <a:pPr algn="l">
-              <a:defRPr sz="1875" b="0">
-                <a:solidFill>
-                  <a:srgbClr val="63788D"/>
-                </a:solidFill>
-                <a:latin typeface="Microsoft YaHei"/>
-                <a:ea typeface="Microsoft YaHei"/>
-                <a:cs typeface="Microsoft YaHei"/>
-              </a:defRPr>
-            </a:pPr>
-            <a:r>
-              <a:rPr sz="1875" b="0">
-                <a:solidFill>
-                  <a:srgbClr val="63788D"/>
-                </a:solidFill>
-                <a:latin typeface="Microsoft YaHei"/>
-                <a:ea typeface="Microsoft YaHei"/>
-                <a:cs typeface="Microsoft YaHei"/>
-              </a:rPr>
-              <a:t>待补：学习时长×练习完成率的</a:t>
-            </a:r>
-          </a:p>
-          <a:p xmlns:a="http://schemas.openxmlformats.org/drawingml/2006/main">
-            <a:pPr algn="l">
-              <a:defRPr sz="1875" b="0">
-                <a:solidFill>
-                  <a:srgbClr val="63788D"/>
-                </a:solidFill>
-                <a:latin typeface="Microsoft YaHei"/>
-                <a:ea typeface="Microsoft YaHei"/>
-                <a:cs typeface="Microsoft YaHei"/>
-              </a:defRPr>
-            </a:pPr>
-            <a:r>
-              <a:rPr sz="1875" b="0">
-                <a:solidFill>
-                  <a:srgbClr val="63788D"/>
-                </a:solidFill>
-                <a:latin typeface="Microsoft YaHei"/>
-                <a:ea typeface="Microsoft YaHei"/>
-                <a:cs typeface="Microsoft YaHei"/>
-              </a:rPr>
-              <a:t>模拟散点图，直线边界与两侧概</a:t>
-            </a:r>
-          </a:p>
-          <a:p xmlns:a="http://schemas.openxmlformats.org/drawingml/2006/main">
-            <a:pPr algn="l">
-              <a:defRPr sz="1875" b="0">
-                <a:solidFill>
-                  <a:srgbClr val="63788D"/>
-                </a:solidFill>
-                <a:latin typeface="Microsoft YaHei"/>
-                <a:ea typeface="Microsoft YaHei"/>
-                <a:cs typeface="Microsoft YaHei"/>
-              </a:defRPr>
-            </a:pPr>
-            <a:r>
-              <a:rPr sz="1875" b="0">
-                <a:solidFill>
-                  <a:srgbClr val="63788D"/>
-                </a:solidFill>
-                <a:latin typeface="Microsoft YaHei"/>
-                <a:ea typeface="Microsoft YaHei"/>
-                <a:cs typeface="Microsoft YaHei"/>
-              </a:rPr>
-              <a:t>率背景；再放一张需要弯曲边界</a:t>
-            </a:r>
-          </a:p>
-          <a:p xmlns:a="http://schemas.openxmlformats.org/drawingml/2006/main">
-            <a:pPr algn="l">
-              <a:defRPr sz="1875" b="0">
-                <a:solidFill>
-                  <a:srgbClr val="63788D"/>
-                </a:solidFill>
-                <a:latin typeface="Microsoft YaHei"/>
-                <a:ea typeface="Microsoft YaHei"/>
-                <a:cs typeface="Microsoft YaHei"/>
-              </a:defRPr>
-            </a:pPr>
-            <a:r>
-              <a:rPr sz="1875" b="0">
-                <a:solidFill>
-                  <a:srgbClr val="63788D"/>
-                </a:solidFill>
-                <a:latin typeface="Microsoft YaHei"/>
-                <a:ea typeface="Microsoft YaHei"/>
-                <a:cs typeface="Microsoft YaHei"/>
-              </a:rPr>
-              <a:t>的数据示意图。</a:t>
+              <a:defRPr sz="1300" b="0">
+                <a:solidFill>
+                  <a:srgbClr val="152139"/>
+                </a:solidFill>
+                <a:latin typeface="Microsoft YaHei"/>
+                <a:ea typeface="Microsoft YaHei"/>
+                <a:cs typeface="Microsoft YaHei"/>
+              </a:defRPr>
+            </a:pPr>
+            <a:r>
+              <a:t>两个特征 → 平面</a:t>
+            </a:r>
+          </a:p>
+          <a:p xmlns:a="http://schemas.openxmlformats.org/drawingml/2006/main">
+            <a:pPr>
+              <a:defRPr sz="1300">
+                <a:solidFill>
+                  <a:srgbClr val="152139"/>
+                </a:solidFill>
+                <a:latin typeface="Microsoft YaHei"/>
+              </a:defRPr>
+            </a:pPr>
+            <a:r>
+              <a:t>p=0.5 是一条直线</a:t>
+            </a:r>
+          </a:p>
+          <a:p xmlns:a="http://schemas.openxmlformats.org/drawingml/2006/main">
+            <a:pPr>
+              <a:defRPr sz="1300">
+                <a:solidFill>
+                  <a:srgbClr val="152139"/>
+                </a:solidFill>
+                <a:latin typeface="Microsoft YaHei"/>
+              </a:defRPr>
+            </a:pPr>
+            <a:r>
+              <a:t>S 形 ≠ 弯曲边界</a:t>
+            </a:r>
+          </a:p>
+          <a:p xmlns:a="http://schemas.openxmlformats.org/drawingml/2006/main">
+            <a:pPr>
+              <a:defRPr sz="1300">
+                <a:solidFill>
+                  <a:srgbClr val="152139"/>
+                </a:solidFill>
+                <a:latin typeface="Microsoft YaHei"/>
+              </a:defRPr>
+            </a:pPr>
+            <a:r>
+              <a:t>环形数据直线不够</a:t>
             </a:r>
           </a:p>
         </p:txBody>
@@ -4525,7 +4401,7 @@
           <a:lstStyle xmlns:a="http://schemas.openxmlformats.org/drawingml/2006/main"/>
           <a:p xmlns:a="http://schemas.openxmlformats.org/drawingml/2006/main">
             <a:pPr algn="l">
-              <a:defRPr sz="1725" b="1">
+              <a:defRPr sz="1200" b="1">
                 <a:solidFill>
                   <a:srgbClr val="087D88"/>
                 </a:solidFill>
@@ -4535,15 +4411,7 @@
               </a:defRPr>
             </a:pPr>
             <a:r>
-              <a:rPr sz="1725" b="1">
-                <a:solidFill>
-                  <a:srgbClr val="087D88"/>
-                </a:solidFill>
-                <a:latin typeface="Microsoft YaHei"/>
-                <a:ea typeface="Microsoft YaHei"/>
-                <a:cs typeface="Microsoft YaHei"/>
-              </a:rPr>
-              <a:t>后续配图建议</a:t>
+              <a:t>本页要点</a:t>
             </a:r>
           </a:p>
         </p:txBody>
@@ -4582,71 +4450,56 @@
           <a:lstStyle xmlns:a="http://schemas.openxmlformats.org/drawingml/2006/main"/>
           <a:p xmlns:a="http://schemas.openxmlformats.org/drawingml/2006/main">
             <a:pPr algn="l">
-              <a:defRPr sz="1875" b="0">
-                <a:solidFill>
-                  <a:srgbClr val="63788D"/>
-                </a:solidFill>
-                <a:latin typeface="Microsoft YaHei"/>
-                <a:ea typeface="Microsoft YaHei"/>
-                <a:cs typeface="Microsoft YaHei"/>
-              </a:defRPr>
-            </a:pPr>
-            <a:r>
-              <a:rPr sz="1875" b="0">
-                <a:solidFill>
-                  <a:srgbClr val="63788D"/>
-                </a:solidFill>
-                <a:latin typeface="Microsoft YaHei"/>
-                <a:ea typeface="Microsoft YaHei"/>
-                <a:cs typeface="Microsoft YaHei"/>
-              </a:rPr>
-              <a:t>待补：回归/分类指标对照表；</a:t>
-            </a:r>
-          </a:p>
-          <a:p xmlns:a="http://schemas.openxmlformats.org/drawingml/2006/main">
-            <a:pPr algn="l">
-              <a:defRPr sz="1875" b="0">
-                <a:solidFill>
-                  <a:srgbClr val="63788D"/>
-                </a:solidFill>
-                <a:latin typeface="Microsoft YaHei"/>
-                <a:ea typeface="Microsoft YaHei"/>
-                <a:cs typeface="Microsoft YaHei"/>
-              </a:defRPr>
-            </a:pPr>
-            <a:r>
-              <a:rPr sz="1875" b="0">
-                <a:solidFill>
-                  <a:srgbClr val="63788D"/>
-                </a:solidFill>
-                <a:latin typeface="Microsoft YaHei"/>
-                <a:ea typeface="Microsoft YaHei"/>
-                <a:cs typeface="Microsoft YaHei"/>
-              </a:rPr>
-              <a:t>另用100个教学模拟样本展示类</a:t>
-            </a:r>
-          </a:p>
-          <a:p xmlns:a="http://schemas.openxmlformats.org/drawingml/2006/main">
-            <a:pPr algn="l">
-              <a:defRPr sz="1875" b="0">
-                <a:solidFill>
-                  <a:srgbClr val="63788D"/>
-                </a:solidFill>
-                <a:latin typeface="Microsoft YaHei"/>
-                <a:ea typeface="Microsoft YaHei"/>
-                <a:cs typeface="Microsoft YaHei"/>
-              </a:defRPr>
-            </a:pPr>
-            <a:r>
-              <a:rPr sz="1875" b="0">
-                <a:solidFill>
-                  <a:srgbClr val="63788D"/>
-                </a:solidFill>
-                <a:latin typeface="Microsoft YaHei"/>
-                <a:ea typeface="Microsoft YaHei"/>
-                <a:cs typeface="Microsoft YaHei"/>
-              </a:rPr>
-              <a:t>别不平衡的准确率陷阱。</a:t>
+              <a:defRPr sz="1300" b="0">
+                <a:solidFill>
+                  <a:srgbClr val="152139"/>
+                </a:solidFill>
+                <a:latin typeface="Microsoft YaHei"/>
+                <a:ea typeface="Microsoft YaHei"/>
+                <a:cs typeface="Microsoft YaHei"/>
+              </a:defRPr>
+            </a:pPr>
+            <a:r>
+              <a:t>回归：MAE / RMSE</a:t>
+            </a:r>
+          </a:p>
+          <a:p xmlns:a="http://schemas.openxmlformats.org/drawingml/2006/main">
+            <a:pPr>
+              <a:defRPr sz="1300">
+                <a:solidFill>
+                  <a:srgbClr val="152139"/>
+                </a:solidFill>
+                <a:latin typeface="Microsoft YaHei"/>
+              </a:defRPr>
+            </a:pPr>
+            <a:r>
+              <a:t>R² 可为负，不是准确率</a:t>
+            </a:r>
+          </a:p>
+          <a:p xmlns:a="http://schemas.openxmlformats.org/drawingml/2006/main">
+            <a:pPr>
+              <a:defRPr sz="1300">
+                <a:solidFill>
+                  <a:srgbClr val="152139"/>
+                </a:solidFill>
+                <a:latin typeface="Microsoft YaHei"/>
+              </a:defRPr>
+            </a:pPr>
+            <a:r>
+              <a:t>分类：P / R / F1</a:t>
+            </a:r>
+          </a:p>
+          <a:p xmlns:a="http://schemas.openxmlformats.org/drawingml/2006/main">
+            <a:pPr>
+              <a:defRPr sz="1300">
+                <a:solidFill>
+                  <a:srgbClr val="152139"/>
+                </a:solidFill>
+                <a:latin typeface="Microsoft YaHei"/>
+              </a:defRPr>
+            </a:pPr>
+            <a:r>
+              <a:t>不平衡别只看准确率</a:t>
             </a:r>
           </a:p>
         </p:txBody>
@@ -5227,7 +5080,7 @@
           <a:lstStyle xmlns:a="http://schemas.openxmlformats.org/drawingml/2006/main"/>
           <a:p xmlns:a="http://schemas.openxmlformats.org/drawingml/2006/main">
             <a:pPr algn="l">
-              <a:defRPr sz="1725" b="1">
+              <a:defRPr sz="1200" b="1">
                 <a:solidFill>
                   <a:srgbClr val="087D88"/>
                 </a:solidFill>
@@ -5237,15 +5090,7 @@
               </a:defRPr>
             </a:pPr>
             <a:r>
-              <a:rPr sz="1725" b="1">
-                <a:solidFill>
-                  <a:srgbClr val="087D88"/>
-                </a:solidFill>
-                <a:latin typeface="Microsoft YaHei"/>
-                <a:ea typeface="Microsoft YaHei"/>
-                <a:cs typeface="Microsoft YaHei"/>
-              </a:rPr>
-              <a:t>后续配图建议</a:t>
+              <a:t>本页要点</a:t>
             </a:r>
           </a:p>
         </p:txBody>
@@ -5284,117 +5129,56 @@
           <a:lstStyle xmlns:a="http://schemas.openxmlformats.org/drawingml/2006/main"/>
           <a:p xmlns:a="http://schemas.openxmlformats.org/drawingml/2006/main">
             <a:pPr algn="l">
-              <a:defRPr sz="1875" b="0">
-                <a:solidFill>
-                  <a:srgbClr val="63788D"/>
-                </a:solidFill>
-                <a:latin typeface="Microsoft YaHei"/>
-                <a:ea typeface="Microsoft YaHei"/>
-                <a:cs typeface="Microsoft YaHei"/>
-              </a:defRPr>
-            </a:pPr>
-            <a:r>
-              <a:rPr sz="1875" b="0">
-                <a:solidFill>
-                  <a:srgbClr val="63788D"/>
-                </a:solidFill>
-                <a:latin typeface="Microsoft YaHei"/>
-                <a:ea typeface="Microsoft YaHei"/>
-                <a:cs typeface="Microsoft YaHei"/>
-              </a:rPr>
-              <a:t>待补：分区数据流程图和空白结</a:t>
-            </a:r>
-          </a:p>
-          <a:p xmlns:a="http://schemas.openxmlformats.org/drawingml/2006/main">
-            <a:pPr algn="l">
-              <a:defRPr sz="1875" b="0">
-                <a:solidFill>
-                  <a:srgbClr val="63788D"/>
-                </a:solidFill>
-                <a:latin typeface="Microsoft YaHei"/>
-                <a:ea typeface="Microsoft YaHei"/>
-                <a:cs typeface="Microsoft YaHei"/>
-              </a:defRPr>
-            </a:pPr>
-            <a:r>
-              <a:rPr sz="1875" b="0">
-                <a:solidFill>
-                  <a:srgbClr val="63788D"/>
-                </a:solidFill>
-                <a:latin typeface="Microsoft YaHei"/>
-                <a:ea typeface="Microsoft YaHei"/>
-                <a:cs typeface="Microsoft YaHei"/>
-              </a:rPr>
-              <a:t>果表</a:t>
-            </a:r>
-          </a:p>
-          <a:p xmlns:a="http://schemas.openxmlformats.org/drawingml/2006/main">
-            <a:pPr algn="l">
-              <a:defRPr sz="1875" b="0">
-                <a:solidFill>
-                  <a:srgbClr val="63788D"/>
-                </a:solidFill>
-                <a:latin typeface="Microsoft YaHei"/>
-                <a:ea typeface="Microsoft YaHei"/>
-                <a:cs typeface="Microsoft YaHei"/>
-              </a:defRPr>
-            </a:pPr>
-            <a:r>
-              <a:rPr sz="1875" b="0">
-                <a:solidFill>
-                  <a:srgbClr val="63788D"/>
-                </a:solidFill>
-                <a:latin typeface="Microsoft YaHei"/>
-                <a:ea typeface="Microsoft YaHei"/>
-                <a:cs typeface="Microsoft YaHei"/>
-              </a:rPr>
-              <a:t>填写项：划分方式、随机种子、</a:t>
-            </a:r>
-          </a:p>
-          <a:p xmlns:a="http://schemas.openxmlformats.org/drawingml/2006/main">
-            <a:pPr algn="l">
-              <a:defRPr sz="1875" b="0">
-                <a:solidFill>
-                  <a:srgbClr val="63788D"/>
-                </a:solidFill>
-                <a:latin typeface="Microsoft YaHei"/>
-                <a:ea typeface="Microsoft YaHei"/>
-                <a:cs typeface="Microsoft YaHei"/>
-              </a:defRPr>
-            </a:pPr>
-            <a:r>
-              <a:rPr sz="1875" b="0">
-                <a:solidFill>
-                  <a:srgbClr val="63788D"/>
-                </a:solidFill>
-                <a:latin typeface="Microsoft YaHei"/>
-                <a:ea typeface="Microsoft YaHei"/>
-                <a:cs typeface="Microsoft YaHei"/>
-              </a:rPr>
-              <a:t>特征、超参数、阈值与评价指标</a:t>
-            </a:r>
-          </a:p>
-          <a:p xmlns:a="http://schemas.openxmlformats.org/drawingml/2006/main">
-            <a:pPr algn="l">
-              <a:defRPr sz="1875" b="0">
-                <a:solidFill>
-                  <a:srgbClr val="63788D"/>
-                </a:solidFill>
-                <a:latin typeface="Microsoft YaHei"/>
-                <a:ea typeface="Microsoft YaHei"/>
-                <a:cs typeface="Microsoft YaHei"/>
-              </a:defRPr>
-            </a:pPr>
-            <a:r>
-              <a:rPr sz="1875" b="0">
-                <a:solidFill>
-                  <a:srgbClr val="63788D"/>
-                </a:solidFill>
-                <a:latin typeface="Microsoft YaHei"/>
-                <a:ea typeface="Microsoft YaHei"/>
-                <a:cs typeface="Microsoft YaHei"/>
-              </a:rPr>
-              <a:t>未运行处标“待运行”</a:t>
+              <a:defRPr sz="1300" b="0">
+                <a:solidFill>
+                  <a:srgbClr val="152139"/>
+                </a:solidFill>
+                <a:latin typeface="Microsoft YaHei"/>
+                <a:ea typeface="Microsoft YaHei"/>
+                <a:cs typeface="Microsoft YaHei"/>
+              </a:defRPr>
+            </a:pPr>
+            <a:r>
+              <a:t>先划分，再标准化</a:t>
+            </a:r>
+          </a:p>
+          <a:p xmlns:a="http://schemas.openxmlformats.org/drawingml/2006/main">
+            <a:pPr>
+              <a:defRPr sz="1300">
+                <a:solidFill>
+                  <a:srgbClr val="152139"/>
+                </a:solidFill>
+                <a:latin typeface="Microsoft YaHei"/>
+              </a:defRPr>
+            </a:pPr>
+            <a:r>
+              <a:t>验证集选参与阈值</a:t>
+            </a:r>
+          </a:p>
+          <a:p xmlns:a="http://schemas.openxmlformats.org/drawingml/2006/main">
+            <a:pPr>
+              <a:defRPr sz="1300">
+                <a:solidFill>
+                  <a:srgbClr val="152139"/>
+                </a:solidFill>
+                <a:latin typeface="Microsoft YaHei"/>
+              </a:defRPr>
+            </a:pPr>
+            <a:r>
+              <a:t>测试集只看一次</a:t>
+            </a:r>
+          </a:p>
+          <a:p xmlns:a="http://schemas.openxmlformats.org/drawingml/2006/main">
+            <a:pPr>
+              <a:defRPr sz="1300">
+                <a:solidFill>
+                  <a:srgbClr val="152139"/>
+                </a:solidFill>
+                <a:latin typeface="Microsoft YaHei"/>
+              </a:defRPr>
+            </a:pPr>
+            <a:r>
+              <a:t>未运行处写待运行</a:t>
             </a:r>
           </a:p>
         </p:txBody>
@@ -5998,7 +5782,7 @@
           <a:lstStyle xmlns:a="http://schemas.openxmlformats.org/drawingml/2006/main"/>
           <a:p xmlns:a="http://schemas.openxmlformats.org/drawingml/2006/main">
             <a:pPr algn="l">
-              <a:defRPr sz="1725" b="1">
+              <a:defRPr sz="1200" b="1">
                 <a:solidFill>
                   <a:srgbClr val="087D88"/>
                 </a:solidFill>
@@ -6008,15 +5792,7 @@
               </a:defRPr>
             </a:pPr>
             <a:r>
-              <a:rPr sz="1725" b="1">
-                <a:solidFill>
-                  <a:srgbClr val="087D88"/>
-                </a:solidFill>
-                <a:latin typeface="Microsoft YaHei"/>
-                <a:ea typeface="Microsoft YaHei"/>
-                <a:cs typeface="Microsoft YaHei"/>
-              </a:rPr>
-              <a:t>后续配图建议</a:t>
+              <a:t>本页要点</a:t>
             </a:r>
           </a:p>
         </p:txBody>
@@ -6055,71 +5831,56 @@
           <a:lstStyle xmlns:a="http://schemas.openxmlformats.org/drawingml/2006/main"/>
           <a:p xmlns:a="http://schemas.openxmlformats.org/drawingml/2006/main">
             <a:pPr algn="l">
-              <a:defRPr sz="1875" b="0">
-                <a:solidFill>
-                  <a:srgbClr val="63788D"/>
-                </a:solidFill>
-                <a:latin typeface="Microsoft YaHei"/>
-                <a:ea typeface="Microsoft YaHei"/>
-                <a:cs typeface="Microsoft YaHei"/>
-              </a:defRPr>
-            </a:pPr>
-            <a:r>
-              <a:rPr sz="1875" b="0">
-                <a:solidFill>
-                  <a:srgbClr val="63788D"/>
-                </a:solidFill>
-                <a:latin typeface="Microsoft YaHei"/>
-                <a:ea typeface="Microsoft YaHei"/>
-                <a:cs typeface="Microsoft YaHei"/>
-              </a:rPr>
-              <a:t>待补：两列算法对照表；页底放</a:t>
-            </a:r>
-          </a:p>
-          <a:p xmlns:a="http://schemas.openxmlformats.org/drawingml/2006/main">
-            <a:pPr algn="l">
-              <a:defRPr sz="1875" b="0">
-                <a:solidFill>
-                  <a:srgbClr val="63788D"/>
-                </a:solidFill>
-                <a:latin typeface="Microsoft YaHei"/>
-                <a:ea typeface="Microsoft YaHei"/>
-                <a:cs typeface="Microsoft YaHei"/>
-              </a:defRPr>
-            </a:pPr>
-            <a:r>
-              <a:rPr sz="1875" b="0">
-                <a:solidFill>
-                  <a:srgbClr val="63788D"/>
-                </a:solidFill>
-                <a:latin typeface="Microsoft YaHei"/>
-                <a:ea typeface="Microsoft YaHei"/>
-                <a:cs typeface="Microsoft YaHei"/>
-              </a:rPr>
-              <a:t>“先做基线，再验证是否需要更</a:t>
-            </a:r>
-          </a:p>
-          <a:p xmlns:a="http://schemas.openxmlformats.org/drawingml/2006/main">
-            <a:pPr algn="l">
-              <a:defRPr sz="1875" b="0">
-                <a:solidFill>
-                  <a:srgbClr val="63788D"/>
-                </a:solidFill>
-                <a:latin typeface="Microsoft YaHei"/>
-                <a:ea typeface="Microsoft YaHei"/>
-                <a:cs typeface="Microsoft YaHei"/>
-              </a:defRPr>
-            </a:pPr>
-            <a:r>
-              <a:rPr sz="1875" b="0">
-                <a:solidFill>
-                  <a:srgbClr val="63788D"/>
-                </a:solidFill>
-                <a:latin typeface="Microsoft YaHei"/>
-                <a:ea typeface="Microsoft YaHei"/>
-                <a:cs typeface="Microsoft YaHei"/>
-              </a:rPr>
-              <a:t>复杂模型”的一句结论。</a:t>
+              <a:defRPr sz="1300" b="0">
+                <a:solidFill>
+                  <a:srgbClr val="152139"/>
+                </a:solidFill>
+                <a:latin typeface="Microsoft YaHei"/>
+                <a:ea typeface="Microsoft YaHei"/>
+                <a:cs typeface="Microsoft YaHei"/>
+              </a:defRPr>
+            </a:pPr>
+            <a:r>
+              <a:t>同：线性加权 + 可学</a:t>
+            </a:r>
+          </a:p>
+          <a:p xmlns:a="http://schemas.openxmlformats.org/drawingml/2006/main">
+            <a:pPr>
+              <a:defRPr sz="1300">
+                <a:solidFill>
+                  <a:srgbClr val="152139"/>
+                </a:solidFill>
+                <a:latin typeface="Microsoft YaHei"/>
+              </a:defRPr>
+            </a:pPr>
+            <a:r>
+              <a:t>异：数值 vs 概率</a:t>
+            </a:r>
+          </a:p>
+          <a:p xmlns:a="http://schemas.openxmlformats.org/drawingml/2006/main">
+            <a:pPr>
+              <a:defRPr sz="1300">
+                <a:solidFill>
+                  <a:srgbClr val="152139"/>
+                </a:solidFill>
+                <a:latin typeface="Microsoft YaHei"/>
+              </a:defRPr>
+            </a:pPr>
+            <a:r>
+              <a:t>适合作为可解释基线</a:t>
+            </a:r>
+          </a:p>
+          <a:p xmlns:a="http://schemas.openxmlformats.org/drawingml/2006/main">
+            <a:pPr>
+              <a:defRPr sz="1300">
+                <a:solidFill>
+                  <a:srgbClr val="152139"/>
+                </a:solidFill>
+                <a:latin typeface="Microsoft YaHei"/>
+              </a:defRPr>
+            </a:pPr>
+            <a:r>
+              <a:t>不够用再加复杂度</a:t>
             </a:r>
           </a:p>
         </p:txBody>
@@ -6700,7 +6461,7 @@
           <a:lstStyle xmlns:a="http://schemas.openxmlformats.org/drawingml/2006/main"/>
           <a:p xmlns:a="http://schemas.openxmlformats.org/drawingml/2006/main">
             <a:pPr algn="l">
-              <a:defRPr sz="1725" b="1">
+              <a:defRPr sz="1200" b="1">
                 <a:solidFill>
                   <a:srgbClr val="087D88"/>
                 </a:solidFill>
@@ -6710,15 +6471,7 @@
               </a:defRPr>
             </a:pPr>
             <a:r>
-              <a:rPr sz="1725" b="1">
-                <a:solidFill>
-                  <a:srgbClr val="087D88"/>
-                </a:solidFill>
-                <a:latin typeface="Microsoft YaHei"/>
-                <a:ea typeface="Microsoft YaHei"/>
-                <a:cs typeface="Microsoft YaHei"/>
-              </a:rPr>
-              <a:t>后续配图建议</a:t>
+              <a:t>本页要点</a:t>
             </a:r>
           </a:p>
         </p:txBody>
@@ -6757,71 +6510,56 @@
           <a:lstStyle xmlns:a="http://schemas.openxmlformats.org/drawingml/2006/main"/>
           <a:p xmlns:a="http://schemas.openxmlformats.org/drawingml/2006/main">
             <a:pPr algn="l">
-              <a:defRPr sz="1875" b="0">
-                <a:solidFill>
-                  <a:srgbClr val="63788D"/>
-                </a:solidFill>
-                <a:latin typeface="Microsoft YaHei"/>
-                <a:ea typeface="Microsoft YaHei"/>
-                <a:cs typeface="Microsoft YaHei"/>
-              </a:defRPr>
-            </a:pPr>
-            <a:r>
-              <a:rPr sz="1875" b="0">
-                <a:solidFill>
-                  <a:srgbClr val="63788D"/>
-                </a:solidFill>
-                <a:latin typeface="Microsoft YaHei"/>
-                <a:ea typeface="Microsoft YaHei"/>
-                <a:cs typeface="Microsoft YaHei"/>
-              </a:rPr>
-              <a:t>待补：三道口头快问卡和一条算</a:t>
-            </a:r>
-          </a:p>
-          <a:p xmlns:a="http://schemas.openxmlformats.org/drawingml/2006/main">
-            <a:pPr algn="l">
-              <a:defRPr sz="1875" b="0">
-                <a:solidFill>
-                  <a:srgbClr val="63788D"/>
-                </a:solidFill>
-                <a:latin typeface="Microsoft YaHei"/>
-                <a:ea typeface="Microsoft YaHei"/>
-                <a:cs typeface="Microsoft YaHei"/>
-              </a:defRPr>
-            </a:pPr>
-            <a:r>
-              <a:rPr sz="1875" b="0">
-                <a:solidFill>
-                  <a:srgbClr val="63788D"/>
-                </a:solidFill>
-                <a:latin typeface="Microsoft YaHei"/>
-                <a:ea typeface="Microsoft YaHei"/>
-                <a:cs typeface="Microsoft YaHei"/>
-              </a:rPr>
-              <a:t>法流程箭头；参考资料放页脚或</a:t>
-            </a:r>
-          </a:p>
-          <a:p xmlns:a="http://schemas.openxmlformats.org/drawingml/2006/main">
-            <a:pPr algn="l">
-              <a:defRPr sz="1875" b="0">
-                <a:solidFill>
-                  <a:srgbClr val="63788D"/>
-                </a:solidFill>
-                <a:latin typeface="Microsoft YaHei"/>
-                <a:ea typeface="Microsoft YaHei"/>
-                <a:cs typeface="Microsoft YaHei"/>
-              </a:defRPr>
-            </a:pPr>
-            <a:r>
-              <a:rPr sz="1875" b="0">
-                <a:solidFill>
-                  <a:srgbClr val="63788D"/>
-                </a:solidFill>
-                <a:latin typeface="Microsoft YaHei"/>
-                <a:ea typeface="Microsoft YaHei"/>
-                <a:cs typeface="Microsoft YaHei"/>
-              </a:rPr>
-              <a:t>备注。</a:t>
+              <a:defRPr sz="1300" b="0">
+                <a:solidFill>
+                  <a:srgbClr val="152139"/>
+                </a:solidFill>
+                <a:latin typeface="Microsoft YaHei"/>
+                <a:ea typeface="Microsoft YaHei"/>
+                <a:cs typeface="Microsoft YaHei"/>
+              </a:defRPr>
+            </a:pPr>
+            <a:r>
+              <a:t>任务 → 模型 → 损失</a:t>
+            </a:r>
+          </a:p>
+          <a:p xmlns:a="http://schemas.openxmlformats.org/drawingml/2006/main">
+            <a:pPr>
+              <a:defRPr sz="1300">
+                <a:solidFill>
+                  <a:srgbClr val="152139"/>
+                </a:solidFill>
+                <a:latin typeface="Microsoft YaHei"/>
+              </a:defRPr>
+            </a:pPr>
+            <a:r>
+              <a:t>→ 优化 → 阈值</a:t>
+            </a:r>
+          </a:p>
+          <a:p xmlns:a="http://schemas.openxmlformats.org/drawingml/2006/main">
+            <a:pPr>
+              <a:defRPr sz="1300">
+                <a:solidFill>
+                  <a:srgbClr val="152139"/>
+                </a:solidFill>
+                <a:latin typeface="Microsoft YaHei"/>
+              </a:defRPr>
+            </a:pPr>
+            <a:r>
+              <a:t>→ 未见数据评价</a:t>
+            </a:r>
+          </a:p>
+          <a:p xmlns:a="http://schemas.openxmlformats.org/drawingml/2006/main">
+            <a:pPr>
+              <a:defRPr sz="1300">
+                <a:solidFill>
+                  <a:srgbClr val="152139"/>
+                </a:solidFill>
+                <a:latin typeface="Microsoft YaHei"/>
+              </a:defRPr>
+            </a:pPr>
+            <a:r>
+              <a:t>三问回收主线</a:t>
             </a:r>
           </a:p>
         </p:txBody>
@@ -7402,7 +7140,7 @@
           <a:lstStyle xmlns:a="http://schemas.openxmlformats.org/drawingml/2006/main"/>
           <a:p xmlns:a="http://schemas.openxmlformats.org/drawingml/2006/main">
             <a:pPr algn="l">
-              <a:defRPr sz="1725" b="1">
+              <a:defRPr sz="1200" b="1">
                 <a:solidFill>
                   <a:srgbClr val="087D88"/>
                 </a:solidFill>
@@ -7412,15 +7150,7 @@
               </a:defRPr>
             </a:pPr>
             <a:r>
-              <a:rPr sz="1725" b="1">
-                <a:solidFill>
-                  <a:srgbClr val="087D88"/>
-                </a:solidFill>
-                <a:latin typeface="Microsoft YaHei"/>
-                <a:ea typeface="Microsoft YaHei"/>
-                <a:cs typeface="Microsoft YaHei"/>
-              </a:rPr>
-              <a:t>后续配图建议</a:t>
+              <a:t>本页要点</a:t>
             </a:r>
           </a:p>
         </p:txBody>
@@ -7459,71 +7189,56 @@
           <a:lstStyle xmlns:a="http://schemas.openxmlformats.org/drawingml/2006/main"/>
           <a:p xmlns:a="http://schemas.openxmlformats.org/drawingml/2006/main">
             <a:pPr algn="l">
-              <a:defRPr sz="1875" b="0">
-                <a:solidFill>
-                  <a:srgbClr val="63788D"/>
-                </a:solidFill>
-                <a:latin typeface="Microsoft YaHei"/>
-                <a:ea typeface="Microsoft YaHei"/>
-                <a:cs typeface="Microsoft YaHei"/>
-              </a:defRPr>
-            </a:pPr>
-            <a:r>
-              <a:rPr sz="1875" b="0">
-                <a:solidFill>
-                  <a:srgbClr val="63788D"/>
-                </a:solidFill>
-                <a:latin typeface="Microsoft YaHei"/>
-                <a:ea typeface="Microsoft YaHei"/>
-                <a:cs typeface="Microsoft YaHei"/>
-              </a:rPr>
-              <a:t>待补：数据→模型→预测→损失</a:t>
-            </a:r>
-          </a:p>
-          <a:p xmlns:a="http://schemas.openxmlformats.org/drawingml/2006/main">
-            <a:pPr algn="l">
-              <a:defRPr sz="1875" b="0">
-                <a:solidFill>
-                  <a:srgbClr val="63788D"/>
-                </a:solidFill>
-                <a:latin typeface="Microsoft YaHei"/>
-                <a:ea typeface="Microsoft YaHei"/>
-                <a:cs typeface="Microsoft YaHei"/>
-              </a:defRPr>
-            </a:pPr>
-            <a:r>
-              <a:rPr sz="1875" b="0">
-                <a:solidFill>
-                  <a:srgbClr val="63788D"/>
-                </a:solidFill>
-                <a:latin typeface="Microsoft YaHei"/>
-                <a:ea typeface="Microsoft YaHei"/>
-                <a:cs typeface="Microsoft YaHei"/>
-              </a:rPr>
-              <a:t>→更新参数的循环图，测试集在</a:t>
-            </a:r>
-          </a:p>
-          <a:p xmlns:a="http://schemas.openxmlformats.org/drawingml/2006/main">
-            <a:pPr algn="l">
-              <a:defRPr sz="1875" b="0">
-                <a:solidFill>
-                  <a:srgbClr val="63788D"/>
-                </a:solidFill>
-                <a:latin typeface="Microsoft YaHei"/>
-                <a:ea typeface="Microsoft YaHei"/>
-                <a:cs typeface="Microsoft YaHei"/>
-              </a:defRPr>
-            </a:pPr>
-            <a:r>
-              <a:rPr sz="1875" b="0">
-                <a:solidFill>
-                  <a:srgbClr val="63788D"/>
-                </a:solidFill>
-                <a:latin typeface="Microsoft YaHei"/>
-                <a:ea typeface="Microsoft YaHei"/>
-                <a:cs typeface="Microsoft YaHei"/>
-              </a:rPr>
-              <a:t>循环外单独评价。</a:t>
+              <a:defRPr sz="1300" b="0">
+                <a:solidFill>
+                  <a:srgbClr val="152139"/>
+                </a:solidFill>
+                <a:latin typeface="Microsoft YaHei"/>
+                <a:ea typeface="Microsoft YaHei"/>
+                <a:cs typeface="Microsoft YaHei"/>
+              </a:defRPr>
+            </a:pPr>
+            <a:r>
+              <a:t>特征 → 模型 → 预测</a:t>
+            </a:r>
+          </a:p>
+          <a:p xmlns:a="http://schemas.openxmlformats.org/drawingml/2006/main">
+            <a:pPr>
+              <a:defRPr sz="1300">
+                <a:solidFill>
+                  <a:srgbClr val="152139"/>
+                </a:solidFill>
+                <a:latin typeface="Microsoft YaHei"/>
+              </a:defRPr>
+            </a:pPr>
+            <a:r>
+              <a:t>→ 损失 → 更新参数</a:t>
+            </a:r>
+          </a:p>
+          <a:p xmlns:a="http://schemas.openxmlformats.org/drawingml/2006/main">
+            <a:pPr>
+              <a:defRPr sz="1300">
+                <a:solidFill>
+                  <a:srgbClr val="152139"/>
+                </a:solidFill>
+                <a:latin typeface="Microsoft YaHei"/>
+              </a:defRPr>
+            </a:pPr>
+            <a:r>
+              <a:t>测试集在循环外</a:t>
+            </a:r>
+          </a:p>
+          <a:p xmlns:a="http://schemas.openxmlformats.org/drawingml/2006/main">
+            <a:pPr>
+              <a:defRPr sz="1300">
+                <a:solidFill>
+                  <a:srgbClr val="152139"/>
+                </a:solidFill>
+                <a:latin typeface="Microsoft YaHei"/>
+              </a:defRPr>
+            </a:pPr>
+            <a:r>
+              <a:t>只评价，不参与训练</a:t>
             </a:r>
           </a:p>
         </p:txBody>
@@ -8104,7 +7819,7 @@
           <a:lstStyle xmlns:a="http://schemas.openxmlformats.org/drawingml/2006/main"/>
           <a:p xmlns:a="http://schemas.openxmlformats.org/drawingml/2006/main">
             <a:pPr algn="l">
-              <a:defRPr sz="1725" b="1">
+              <a:defRPr sz="1200" b="1">
                 <a:solidFill>
                   <a:srgbClr val="087D88"/>
                 </a:solidFill>
@@ -8114,15 +7829,7 @@
               </a:defRPr>
             </a:pPr>
             <a:r>
-              <a:rPr sz="1725" b="1">
-                <a:solidFill>
-                  <a:srgbClr val="087D88"/>
-                </a:solidFill>
-                <a:latin typeface="Microsoft YaHei"/>
-                <a:ea typeface="Microsoft YaHei"/>
-                <a:cs typeface="Microsoft YaHei"/>
-              </a:rPr>
-              <a:t>后续配图建议</a:t>
+              <a:t>本页要点</a:t>
             </a:r>
           </a:p>
         </p:txBody>
@@ -8161,94 +7868,56 @@
           <a:lstStyle xmlns:a="http://schemas.openxmlformats.org/drawingml/2006/main"/>
           <a:p xmlns:a="http://schemas.openxmlformats.org/drawingml/2006/main">
             <a:pPr algn="l">
-              <a:defRPr sz="1875" b="0">
-                <a:solidFill>
-                  <a:srgbClr val="63788D"/>
-                </a:solidFill>
-                <a:latin typeface="Microsoft YaHei"/>
-                <a:ea typeface="Microsoft YaHei"/>
-                <a:cs typeface="Microsoft YaHei"/>
-              </a:defRPr>
-            </a:pPr>
-            <a:r>
-              <a:rPr sz="1875" b="0">
-                <a:solidFill>
-                  <a:srgbClr val="63788D"/>
-                </a:solidFill>
-                <a:latin typeface="Microsoft YaHei"/>
-                <a:ea typeface="Microsoft YaHei"/>
-                <a:cs typeface="Microsoft YaHei"/>
-              </a:rPr>
-              <a:t>待补：学习时长—分数散点图、</a:t>
-            </a:r>
-          </a:p>
-          <a:p xmlns:a="http://schemas.openxmlformats.org/drawingml/2006/main">
-            <a:pPr algn="l">
-              <a:defRPr sz="1875" b="0">
-                <a:solidFill>
-                  <a:srgbClr val="63788D"/>
-                </a:solidFill>
-                <a:latin typeface="Microsoft YaHei"/>
-                <a:ea typeface="Microsoft YaHei"/>
-                <a:cs typeface="Microsoft YaHei"/>
-              </a:defRPr>
-            </a:pPr>
-            <a:r>
-              <a:rPr sz="1875" b="0">
-                <a:solidFill>
-                  <a:srgbClr val="63788D"/>
-                </a:solidFill>
-                <a:latin typeface="Microsoft YaHei"/>
-                <a:ea typeface="Microsoft YaHei"/>
-                <a:cs typeface="Microsoft YaHei"/>
-              </a:rPr>
-              <a:t>一条预测直线，以及斜率/截距</a:t>
-            </a:r>
-          </a:p>
-          <a:p xmlns:a="http://schemas.openxmlformats.org/drawingml/2006/main">
-            <a:pPr algn="l">
-              <a:defRPr sz="1875" b="0">
-                <a:solidFill>
-                  <a:srgbClr val="63788D"/>
-                </a:solidFill>
-                <a:latin typeface="Microsoft YaHei"/>
-                <a:ea typeface="Microsoft YaHei"/>
-                <a:cs typeface="Microsoft YaHei"/>
-              </a:defRPr>
-            </a:pPr>
-            <a:r>
-              <a:rPr sz="1875" b="0">
-                <a:solidFill>
-                  <a:srgbClr val="63788D"/>
-                </a:solidFill>
-                <a:latin typeface="Microsoft YaHei"/>
-                <a:ea typeface="Microsoft YaHei"/>
-                <a:cs typeface="Microsoft YaHei"/>
-              </a:rPr>
-              <a:t>的可编辑标注；只保留一行核心</a:t>
-            </a:r>
-          </a:p>
-          <a:p xmlns:a="http://schemas.openxmlformats.org/drawingml/2006/main">
-            <a:pPr algn="l">
-              <a:defRPr sz="1875" b="0">
-                <a:solidFill>
-                  <a:srgbClr val="63788D"/>
-                </a:solidFill>
-                <a:latin typeface="Microsoft YaHei"/>
-                <a:ea typeface="Microsoft YaHei"/>
-                <a:cs typeface="Microsoft YaHei"/>
-              </a:defRPr>
-            </a:pPr>
-            <a:r>
-              <a:rPr sz="1875" b="0">
-                <a:solidFill>
-                  <a:srgbClr val="63788D"/>
-                </a:solidFill>
-                <a:latin typeface="Microsoft YaHei"/>
-                <a:ea typeface="Microsoft YaHei"/>
-                <a:cs typeface="Microsoft YaHei"/>
-              </a:rPr>
-              <a:t>模型公式。</a:t>
+              <a:defRPr sz="1300" b="0">
+                <a:solidFill>
+                  <a:srgbClr val="152139"/>
+                </a:solidFill>
+                <a:latin typeface="Microsoft YaHei"/>
+                <a:ea typeface="Microsoft YaHei"/>
+                <a:cs typeface="Microsoft YaHei"/>
+              </a:defRPr>
+            </a:pPr>
+            <a:r>
+              <a:t>ŷ = wx + b</a:t>
+            </a:r>
+          </a:p>
+          <a:p xmlns:a="http://schemas.openxmlformats.org/drawingml/2006/main">
+            <a:pPr>
+              <a:defRPr sz="1300">
+                <a:solidFill>
+                  <a:srgbClr val="152139"/>
+                </a:solidFill>
+                <a:latin typeface="Microsoft YaHei"/>
+              </a:defRPr>
+            </a:pPr>
+            <a:r>
+              <a:t>w：斜率，管倾斜</a:t>
+            </a:r>
+          </a:p>
+          <a:p xmlns:a="http://schemas.openxmlformats.org/drawingml/2006/main">
+            <a:pPr>
+              <a:defRPr sz="1300">
+                <a:solidFill>
+                  <a:srgbClr val="152139"/>
+                </a:solidFill>
+                <a:latin typeface="Microsoft YaHei"/>
+              </a:defRPr>
+            </a:pPr>
+            <a:r>
+              <a:t>b：截距，管上下平移</a:t>
+            </a:r>
+          </a:p>
+          <a:p xmlns:a="http://schemas.openxmlformats.org/drawingml/2006/main">
+            <a:pPr>
+              <a:defRPr sz="1300">
+                <a:solidFill>
+                  <a:srgbClr val="152139"/>
+                </a:solidFill>
+                <a:latin typeface="Microsoft YaHei"/>
+              </a:defRPr>
+            </a:pPr>
+            <a:r>
+              <a:t>不要求穿过每个点</a:t>
             </a:r>
           </a:p>
         </p:txBody>
@@ -8829,7 +8498,7 @@
           <a:lstStyle xmlns:a="http://schemas.openxmlformats.org/drawingml/2006/main"/>
           <a:p xmlns:a="http://schemas.openxmlformats.org/drawingml/2006/main">
             <a:pPr algn="l">
-              <a:defRPr sz="1725" b="1">
+              <a:defRPr sz="1200" b="1">
                 <a:solidFill>
                   <a:srgbClr val="087D88"/>
                 </a:solidFill>
@@ -8839,15 +8508,7 @@
               </a:defRPr>
             </a:pPr>
             <a:r>
-              <a:rPr sz="1725" b="1">
-                <a:solidFill>
-                  <a:srgbClr val="087D88"/>
-                </a:solidFill>
-                <a:latin typeface="Microsoft YaHei"/>
-                <a:ea typeface="Microsoft YaHei"/>
-                <a:cs typeface="Microsoft YaHei"/>
-              </a:rPr>
-              <a:t>后续配图建议</a:t>
+              <a:t>本页要点</a:t>
             </a:r>
           </a:p>
         </p:txBody>
@@ -8886,71 +8547,56 @@
           <a:lstStyle xmlns:a="http://schemas.openxmlformats.org/drawingml/2006/main"/>
           <a:p xmlns:a="http://schemas.openxmlformats.org/drawingml/2006/main">
             <a:pPr algn="l">
-              <a:defRPr sz="1875" b="0">
-                <a:solidFill>
-                  <a:srgbClr val="63788D"/>
-                </a:solidFill>
-                <a:latin typeface="Microsoft YaHei"/>
-                <a:ea typeface="Microsoft YaHei"/>
-                <a:cs typeface="Microsoft YaHei"/>
-              </a:defRPr>
-            </a:pPr>
-            <a:r>
-              <a:rPr sz="1875" b="0">
-                <a:solidFill>
-                  <a:srgbClr val="63788D"/>
-                </a:solidFill>
-                <a:latin typeface="Microsoft YaHei"/>
-                <a:ea typeface="Microsoft YaHei"/>
-                <a:cs typeface="Microsoft YaHei"/>
-              </a:rPr>
-              <a:t>待补：残差竖线、MSE数值与参</a:t>
-            </a:r>
-          </a:p>
-          <a:p xmlns:a="http://schemas.openxmlformats.org/drawingml/2006/main">
-            <a:pPr algn="l">
-              <a:defRPr sz="1875" b="0">
-                <a:solidFill>
-                  <a:srgbClr val="63788D"/>
-                </a:solidFill>
-                <a:latin typeface="Microsoft YaHei"/>
-                <a:ea typeface="Microsoft YaHei"/>
-                <a:cs typeface="Microsoft YaHei"/>
-              </a:defRPr>
-            </a:pPr>
-            <a:r>
-              <a:rPr sz="1875" b="0">
-                <a:solidFill>
-                  <a:srgbClr val="63788D"/>
-                </a:solidFill>
-                <a:latin typeface="Microsoft YaHei"/>
-                <a:ea typeface="Microsoft YaHei"/>
-                <a:cs typeface="Microsoft YaHei"/>
-              </a:rPr>
-              <a:t>数滑块的网页截图；保留35秒交</a:t>
-            </a:r>
-          </a:p>
-          <a:p xmlns:a="http://schemas.openxmlformats.org/drawingml/2006/main">
-            <a:pPr algn="l">
-              <a:defRPr sz="1875" b="0">
-                <a:solidFill>
-                  <a:srgbClr val="63788D"/>
-                </a:solidFill>
-                <a:latin typeface="Microsoft YaHei"/>
-                <a:ea typeface="Microsoft YaHei"/>
-                <a:cs typeface="Microsoft YaHei"/>
-              </a:defRPr>
-            </a:pPr>
-            <a:r>
-              <a:rPr sz="1875" b="0">
-                <a:solidFill>
-                  <a:srgbClr val="63788D"/>
-                </a:solidFill>
-                <a:latin typeface="Microsoft YaHei"/>
-                <a:ea typeface="Microsoft YaHei"/>
-                <a:cs typeface="Microsoft YaHei"/>
-              </a:rPr>
-              <a:t>互演示。</a:t>
+              <a:defRPr sz="1300" b="0">
+                <a:solidFill>
+                  <a:srgbClr val="152139"/>
+                </a:solidFill>
+                <a:latin typeface="Microsoft YaHei"/>
+                <a:ea typeface="Microsoft YaHei"/>
+                <a:cs typeface="Microsoft YaHei"/>
+              </a:defRPr>
+            </a:pPr>
+            <a:r>
+              <a:t>残差 e = ŷ − y</a:t>
+            </a:r>
+          </a:p>
+          <a:p xmlns:a="http://schemas.openxmlformats.org/drawingml/2006/main">
+            <a:pPr>
+              <a:defRPr sz="1300">
+                <a:solidFill>
+                  <a:srgbClr val="152139"/>
+                </a:solidFill>
+                <a:latin typeface="Microsoft YaHei"/>
+              </a:defRPr>
+            </a:pPr>
+            <a:r>
+              <a:t>MSE = 平均(e²)</a:t>
+            </a:r>
+          </a:p>
+          <a:p xmlns:a="http://schemas.openxmlformats.org/drawingml/2006/main">
+            <a:pPr>
+              <a:defRPr sz="1300">
+                <a:solidFill>
+                  <a:srgbClr val="152139"/>
+                </a:solidFill>
+                <a:latin typeface="Microsoft YaHei"/>
+              </a:defRPr>
+            </a:pPr>
+            <a:r>
+              <a:t>大偏差被更重惩罚</a:t>
+            </a:r>
+          </a:p>
+          <a:p xmlns:a="http://schemas.openxmlformats.org/drawingml/2006/main">
+            <a:pPr>
+              <a:defRPr sz="1300">
+                <a:solidFill>
+                  <a:srgbClr val="152139"/>
+                </a:solidFill>
+                <a:latin typeface="Microsoft YaHei"/>
+              </a:defRPr>
+            </a:pPr>
+            <a:r>
+              <a:t>现场：拖 w、b 看 MSE</a:t>
             </a:r>
           </a:p>
         </p:txBody>
@@ -9531,7 +9177,7 @@
           <a:lstStyle xmlns:a="http://schemas.openxmlformats.org/drawingml/2006/main"/>
           <a:p xmlns:a="http://schemas.openxmlformats.org/drawingml/2006/main">
             <a:pPr algn="l">
-              <a:defRPr sz="1725" b="1">
+              <a:defRPr sz="1200" b="1">
                 <a:solidFill>
                   <a:srgbClr val="087D88"/>
                 </a:solidFill>
@@ -9541,15 +9187,7 @@
               </a:defRPr>
             </a:pPr>
             <a:r>
-              <a:rPr sz="1725" b="1">
-                <a:solidFill>
-                  <a:srgbClr val="087D88"/>
-                </a:solidFill>
-                <a:latin typeface="Microsoft YaHei"/>
-                <a:ea typeface="Microsoft YaHei"/>
-                <a:cs typeface="Microsoft YaHei"/>
-              </a:rPr>
-              <a:t>后续配图建议</a:t>
+              <a:t>本页要点</a:t>
             </a:r>
           </a:p>
         </p:txBody>
@@ -9588,71 +9226,56 @@
           <a:lstStyle xmlns:a="http://schemas.openxmlformats.org/drawingml/2006/main"/>
           <a:p xmlns:a="http://schemas.openxmlformats.org/drawingml/2006/main">
             <a:pPr algn="l">
-              <a:defRPr sz="1875" b="0">
-                <a:solidFill>
-                  <a:srgbClr val="63788D"/>
-                </a:solidFill>
-                <a:latin typeface="Microsoft YaHei"/>
-                <a:ea typeface="Microsoft YaHei"/>
-                <a:cs typeface="Microsoft YaHei"/>
-              </a:defRPr>
-            </a:pPr>
-            <a:r>
-              <a:rPr sz="1875" b="0">
-                <a:solidFill>
-                  <a:srgbClr val="63788D"/>
-                </a:solidFill>
-                <a:latin typeface="Microsoft YaHei"/>
-                <a:ea typeface="Microsoft YaHei"/>
-                <a:cs typeface="Microsoft YaHei"/>
-              </a:rPr>
-              <a:t>待补：损失曲线与当前参数点、</a:t>
-            </a:r>
-          </a:p>
-          <a:p xmlns:a="http://schemas.openxmlformats.org/drawingml/2006/main">
-            <a:pPr algn="l">
-              <a:defRPr sz="1875" b="0">
-                <a:solidFill>
-                  <a:srgbClr val="63788D"/>
-                </a:solidFill>
-                <a:latin typeface="Microsoft YaHei"/>
-                <a:ea typeface="Microsoft YaHei"/>
-                <a:cs typeface="Microsoft YaHei"/>
-              </a:defRPr>
-            </a:pPr>
-            <a:r>
-              <a:rPr sz="1875" b="0">
-                <a:solidFill>
-                  <a:srgbClr val="63788D"/>
-                </a:solidFill>
-                <a:latin typeface="Microsoft YaHei"/>
-                <a:ea typeface="Microsoft YaHei"/>
-                <a:cs typeface="Microsoft YaHei"/>
-              </a:rPr>
-              <a:t>正常/过大学习率对照；保留40</a:t>
-            </a:r>
-          </a:p>
-          <a:p xmlns:a="http://schemas.openxmlformats.org/drawingml/2006/main">
-            <a:pPr algn="l">
-              <a:defRPr sz="1875" b="0">
-                <a:solidFill>
-                  <a:srgbClr val="63788D"/>
-                </a:solidFill>
-                <a:latin typeface="Microsoft YaHei"/>
-                <a:ea typeface="Microsoft YaHei"/>
-                <a:cs typeface="Microsoft YaHei"/>
-              </a:defRPr>
-            </a:pPr>
-            <a:r>
-              <a:rPr sz="1875" b="0">
-                <a:solidFill>
-                  <a:srgbClr val="63788D"/>
-                </a:solidFill>
-                <a:latin typeface="Microsoft YaHei"/>
-                <a:ea typeface="Microsoft YaHei"/>
-                <a:cs typeface="Microsoft YaHei"/>
-              </a:rPr>
-              <a:t>秒交互演示。</a:t>
+              <a:defRPr sz="1300" b="0">
+                <a:solidFill>
+                  <a:srgbClr val="152139"/>
+                </a:solidFill>
+                <a:latin typeface="Microsoft YaHei"/>
+                <a:ea typeface="Microsoft YaHei"/>
+                <a:cs typeface="Microsoft YaHei"/>
+              </a:defRPr>
+            </a:pPr>
+            <a:r>
+              <a:t>θ ← θ − α∇J</a:t>
+            </a:r>
+          </a:p>
+          <a:p xmlns:a="http://schemas.openxmlformats.org/drawingml/2006/main">
+            <a:pPr>
+              <a:defRPr sz="1300">
+                <a:solidFill>
+                  <a:srgbClr val="152139"/>
+                </a:solidFill>
+                <a:latin typeface="Microsoft YaHei"/>
+              </a:defRPr>
+            </a:pPr>
+            <a:r>
+              <a:t>α 合适：损失下降</a:t>
+            </a:r>
+          </a:p>
+          <a:p xmlns:a="http://schemas.openxmlformats.org/drawingml/2006/main">
+            <a:pPr>
+              <a:defRPr sz="1300">
+                <a:solidFill>
+                  <a:srgbClr val="152139"/>
+                </a:solidFill>
+                <a:latin typeface="Microsoft YaHei"/>
+              </a:defRPr>
+            </a:pPr>
+            <a:r>
+              <a:t>α 过大：振荡或发散</a:t>
+            </a:r>
+          </a:p>
+          <a:p xmlns:a="http://schemas.openxmlformats.org/drawingml/2006/main">
+            <a:pPr>
+              <a:defRPr sz="1300">
+                <a:solidFill>
+                  <a:srgbClr val="152139"/>
+                </a:solidFill>
+                <a:latin typeface="Microsoft YaHei"/>
+              </a:defRPr>
+            </a:pPr>
+            <a:r>
+              <a:t>模型 ≠ 求解方法</a:t>
             </a:r>
           </a:p>
         </p:txBody>
@@ -10233,7 +9856,7 @@
           <a:lstStyle xmlns:a="http://schemas.openxmlformats.org/drawingml/2006/main"/>
           <a:p xmlns:a="http://schemas.openxmlformats.org/drawingml/2006/main">
             <a:pPr algn="l">
-              <a:defRPr sz="1725" b="1">
+              <a:defRPr sz="1200" b="1">
                 <a:solidFill>
                   <a:srgbClr val="087D88"/>
                 </a:solidFill>
@@ -10243,15 +9866,7 @@
               </a:defRPr>
             </a:pPr>
             <a:r>
-              <a:rPr sz="1725" b="1">
-                <a:solidFill>
-                  <a:srgbClr val="087D88"/>
-                </a:solidFill>
-                <a:latin typeface="Microsoft YaHei"/>
-                <a:ea typeface="Microsoft YaHei"/>
-                <a:cs typeface="Microsoft YaHei"/>
-              </a:rPr>
-              <a:t>后续配图建议</a:t>
+              <a:t>本页要点</a:t>
             </a:r>
           </a:p>
         </p:txBody>
@@ -10290,71 +9905,56 @@
           <a:lstStyle xmlns:a="http://schemas.openxmlformats.org/drawingml/2006/main"/>
           <a:p xmlns:a="http://schemas.openxmlformats.org/drawingml/2006/main">
             <a:pPr algn="l">
-              <a:defRPr sz="1875" b="0">
-                <a:solidFill>
-                  <a:srgbClr val="63788D"/>
-                </a:solidFill>
-                <a:latin typeface="Microsoft YaHei"/>
-                <a:ea typeface="Microsoft YaHei"/>
-                <a:cs typeface="Microsoft YaHei"/>
-              </a:defRPr>
-            </a:pPr>
-            <a:r>
-              <a:rPr sz="1875" b="0">
-                <a:solidFill>
-                  <a:srgbClr val="63788D"/>
-                </a:solidFill>
-                <a:latin typeface="Microsoft YaHei"/>
-                <a:ea typeface="Microsoft YaHei"/>
-                <a:cs typeface="Microsoft YaHei"/>
-              </a:rPr>
-              <a:t>待补：连续分数轴与0/1标签轴</a:t>
-            </a:r>
-          </a:p>
-          <a:p xmlns:a="http://schemas.openxmlformats.org/drawingml/2006/main">
-            <a:pPr algn="l">
-              <a:defRPr sz="1875" b="0">
-                <a:solidFill>
-                  <a:srgbClr val="63788D"/>
-                </a:solidFill>
-                <a:latin typeface="Microsoft YaHei"/>
-                <a:ea typeface="Microsoft YaHei"/>
-                <a:cs typeface="Microsoft YaHei"/>
-              </a:defRPr>
-            </a:pPr>
-            <a:r>
-              <a:rPr sz="1875" b="0">
-                <a:solidFill>
-                  <a:srgbClr val="63788D"/>
-                </a:solidFill>
-                <a:latin typeface="Microsoft YaHei"/>
-                <a:ea typeface="Microsoft YaHei"/>
-                <a:cs typeface="Microsoft YaHei"/>
-              </a:rPr>
-              <a:t>并排；用越过0和1的直线引出概</a:t>
-            </a:r>
-          </a:p>
-          <a:p xmlns:a="http://schemas.openxmlformats.org/drawingml/2006/main">
-            <a:pPr algn="l">
-              <a:defRPr sz="1875" b="0">
-                <a:solidFill>
-                  <a:srgbClr val="63788D"/>
-                </a:solidFill>
-                <a:latin typeface="Microsoft YaHei"/>
-                <a:ea typeface="Microsoft YaHei"/>
-                <a:cs typeface="Microsoft YaHei"/>
-              </a:defRPr>
-            </a:pPr>
-            <a:r>
-              <a:rPr sz="1875" b="0">
-                <a:solidFill>
-                  <a:srgbClr val="63788D"/>
-                </a:solidFill>
-                <a:latin typeface="Microsoft YaHei"/>
-                <a:ea typeface="Microsoft YaHei"/>
-                <a:cs typeface="Microsoft YaHei"/>
-              </a:rPr>
-              <a:t>率映射。</a:t>
+              <a:defRPr sz="1300" b="0">
+                <a:solidFill>
+                  <a:srgbClr val="152139"/>
+                </a:solidFill>
+                <a:latin typeface="Microsoft YaHei"/>
+                <a:ea typeface="Microsoft YaHei"/>
+                <a:cs typeface="Microsoft YaHei"/>
+              </a:defRPr>
+            </a:pPr>
+            <a:r>
+              <a:t>标签改为 0 / 1</a:t>
+            </a:r>
+          </a:p>
+          <a:p xmlns:a="http://schemas.openxmlformats.org/drawingml/2006/main">
+            <a:pPr>
+              <a:defRPr sz="1300">
+                <a:solidFill>
+                  <a:srgbClr val="152139"/>
+                </a:solidFill>
+                <a:latin typeface="Microsoft YaHei"/>
+              </a:defRPr>
+            </a:pPr>
+            <a:r>
+              <a:t>直线可能 &lt;0 或 &gt;1</a:t>
+            </a:r>
+          </a:p>
+          <a:p xmlns:a="http://schemas.openxmlformats.org/drawingml/2006/main">
+            <a:pPr>
+              <a:defRPr sz="1300">
+                <a:solidFill>
+                  <a:srgbClr val="152139"/>
+                </a:solidFill>
+                <a:latin typeface="Microsoft YaHei"/>
+              </a:defRPr>
+            </a:pPr>
+            <a:r>
+              <a:t>逻辑回归：先概率</a:t>
+            </a:r>
+          </a:p>
+          <a:p xmlns:a="http://schemas.openxmlformats.org/drawingml/2006/main">
+            <a:pPr>
+              <a:defRPr sz="1300">
+                <a:solidFill>
+                  <a:srgbClr val="152139"/>
+                </a:solidFill>
+                <a:latin typeface="Microsoft YaHei"/>
+              </a:defRPr>
+            </a:pPr>
+            <a:r>
+              <a:t>再按阈值得到类别</a:t>
             </a:r>
           </a:p>
         </p:txBody>
@@ -10935,7 +10535,7 @@
           <a:lstStyle xmlns:a="http://schemas.openxmlformats.org/drawingml/2006/main"/>
           <a:p xmlns:a="http://schemas.openxmlformats.org/drawingml/2006/main">
             <a:pPr algn="l">
-              <a:defRPr sz="1725" b="1">
+              <a:defRPr sz="1200" b="1">
                 <a:solidFill>
                   <a:srgbClr val="087D88"/>
                 </a:solidFill>
@@ -10945,15 +10545,7 @@
               </a:defRPr>
             </a:pPr>
             <a:r>
-              <a:rPr sz="1725" b="1">
-                <a:solidFill>
-                  <a:srgbClr val="087D88"/>
-                </a:solidFill>
-                <a:latin typeface="Microsoft YaHei"/>
-                <a:ea typeface="Microsoft YaHei"/>
-                <a:cs typeface="Microsoft YaHei"/>
-              </a:rPr>
-              <a:t>后续配图建议</a:t>
+              <a:t>本页要点</a:t>
             </a:r>
           </a:p>
         </p:txBody>
@@ -10992,48 +10584,56 @@
           <a:lstStyle xmlns:a="http://schemas.openxmlformats.org/drawingml/2006/main"/>
           <a:p xmlns:a="http://schemas.openxmlformats.org/drawingml/2006/main">
             <a:pPr algn="l">
-              <a:defRPr sz="1875" b="0">
-                <a:solidFill>
-                  <a:srgbClr val="63788D"/>
-                </a:solidFill>
-                <a:latin typeface="Microsoft YaHei"/>
-                <a:ea typeface="Microsoft YaHei"/>
-                <a:cs typeface="Microsoft YaHei"/>
-              </a:defRPr>
-            </a:pPr>
-            <a:r>
-              <a:rPr sz="1875" b="0">
-                <a:solidFill>
-                  <a:srgbClr val="63788D"/>
-                </a:solidFill>
-                <a:latin typeface="Microsoft YaHei"/>
-                <a:ea typeface="Microsoft YaHei"/>
-                <a:cs typeface="Microsoft YaHei"/>
-              </a:rPr>
-              <a:t>待补：Sigmoid曲线与z、p联动</a:t>
-            </a:r>
-          </a:p>
-          <a:p xmlns:a="http://schemas.openxmlformats.org/drawingml/2006/main">
-            <a:pPr algn="l">
-              <a:defRPr sz="1875" b="0">
-                <a:solidFill>
-                  <a:srgbClr val="63788D"/>
-                </a:solidFill>
-                <a:latin typeface="Microsoft YaHei"/>
-                <a:ea typeface="Microsoft YaHei"/>
-                <a:cs typeface="Microsoft YaHei"/>
-              </a:defRPr>
-            </a:pPr>
-            <a:r>
-              <a:rPr sz="1875" b="0">
-                <a:solidFill>
-                  <a:srgbClr val="63788D"/>
-                </a:solidFill>
-                <a:latin typeface="Microsoft YaHei"/>
-                <a:ea typeface="Microsoft YaHei"/>
-                <a:cs typeface="Microsoft YaHei"/>
-              </a:rPr>
-              <a:t>读数；保留30秒交互演示。</a:t>
+              <a:defRPr sz="1300" b="0">
+                <a:solidFill>
+                  <a:srgbClr val="152139"/>
+                </a:solidFill>
+                <a:latin typeface="Microsoft YaHei"/>
+                <a:ea typeface="Microsoft YaHei"/>
+                <a:cs typeface="Microsoft YaHei"/>
+              </a:defRPr>
+            </a:pPr>
+            <a:r>
+              <a:t>z = wx + b</a:t>
+            </a:r>
+          </a:p>
+          <a:p xmlns:a="http://schemas.openxmlformats.org/drawingml/2006/main">
+            <a:pPr>
+              <a:defRPr sz="1300">
+                <a:solidFill>
+                  <a:srgbClr val="152139"/>
+                </a:solidFill>
+                <a:latin typeface="Microsoft YaHei"/>
+              </a:defRPr>
+            </a:pPr>
+            <a:r>
+              <a:t>p = σ(z)</a:t>
+            </a:r>
+          </a:p>
+          <a:p xmlns:a="http://schemas.openxmlformats.org/drawingml/2006/main">
+            <a:pPr>
+              <a:defRPr sz="1300">
+                <a:solidFill>
+                  <a:srgbClr val="152139"/>
+                </a:solidFill>
+                <a:latin typeface="Microsoft YaHei"/>
+              </a:defRPr>
+            </a:pPr>
+            <a:r>
+              <a:t>z = 0 → p = 0.5</a:t>
+            </a:r>
+          </a:p>
+          <a:p xmlns:a="http://schemas.openxmlformats.org/drawingml/2006/main">
+            <a:pPr>
+              <a:defRPr sz="1300">
+                <a:solidFill>
+                  <a:srgbClr val="152139"/>
+                </a:solidFill>
+                <a:latin typeface="Microsoft YaHei"/>
+              </a:defRPr>
+            </a:pPr>
+            <a:r>
+              <a:t>0.8 不是 80 分</a:t>
             </a:r>
           </a:p>
         </p:txBody>
@@ -11614,7 +11214,7 @@
           <a:lstStyle xmlns:a="http://schemas.openxmlformats.org/drawingml/2006/main"/>
           <a:p xmlns:a="http://schemas.openxmlformats.org/drawingml/2006/main">
             <a:pPr algn="l">
-              <a:defRPr sz="1725" b="1">
+              <a:defRPr sz="1200" b="1">
                 <a:solidFill>
                   <a:srgbClr val="087D88"/>
                 </a:solidFill>
@@ -11624,15 +11224,7 @@
               </a:defRPr>
             </a:pPr>
             <a:r>
-              <a:rPr sz="1725" b="1">
-                <a:solidFill>
-                  <a:srgbClr val="087D88"/>
-                </a:solidFill>
-                <a:latin typeface="Microsoft YaHei"/>
-                <a:ea typeface="Microsoft YaHei"/>
-                <a:cs typeface="Microsoft YaHei"/>
-              </a:rPr>
-              <a:t>后续配图建议</a:t>
+              <a:t>本页要点</a:t>
             </a:r>
           </a:p>
         </p:txBody>
@@ -11671,71 +11263,56 @@
           <a:lstStyle xmlns:a="http://schemas.openxmlformats.org/drawingml/2006/main"/>
           <a:p xmlns:a="http://schemas.openxmlformats.org/drawingml/2006/main">
             <a:pPr algn="l">
-              <a:defRPr sz="1875" b="0">
-                <a:solidFill>
-                  <a:srgbClr val="63788D"/>
-                </a:solidFill>
-                <a:latin typeface="Microsoft YaHei"/>
-                <a:ea typeface="Microsoft YaHei"/>
-                <a:cs typeface="Microsoft YaHei"/>
-              </a:defRPr>
-            </a:pPr>
-            <a:r>
-              <a:rPr sz="1875" b="0">
-                <a:solidFill>
-                  <a:srgbClr val="63788D"/>
-                </a:solidFill>
-                <a:latin typeface="Microsoft YaHei"/>
-                <a:ea typeface="Microsoft YaHei"/>
-                <a:cs typeface="Microsoft YaHei"/>
-              </a:rPr>
-              <a:t>待补：真实标签为1时的三个预</a:t>
-            </a:r>
-          </a:p>
-          <a:p xmlns:a="http://schemas.openxmlformats.org/drawingml/2006/main">
-            <a:pPr algn="l">
-              <a:defRPr sz="1875" b="0">
-                <a:solidFill>
-                  <a:srgbClr val="63788D"/>
-                </a:solidFill>
-                <a:latin typeface="Microsoft YaHei"/>
-                <a:ea typeface="Microsoft YaHei"/>
-                <a:cs typeface="Microsoft YaHei"/>
-              </a:defRPr>
-            </a:pPr>
-            <a:r>
-              <a:rPr sz="1875" b="0">
-                <a:solidFill>
-                  <a:srgbClr val="63788D"/>
-                </a:solidFill>
-                <a:latin typeface="Microsoft YaHei"/>
-                <a:ea typeface="Microsoft YaHei"/>
-                <a:cs typeface="Microsoft YaHei"/>
-              </a:rPr>
-              <a:t>测概率及损失对照卡；公式推导</a:t>
-            </a:r>
-          </a:p>
-          <a:p xmlns:a="http://schemas.openxmlformats.org/drawingml/2006/main">
-            <a:pPr algn="l">
-              <a:defRPr sz="1875" b="0">
-                <a:solidFill>
-                  <a:srgbClr val="63788D"/>
-                </a:solidFill>
-                <a:latin typeface="Microsoft YaHei"/>
-                <a:ea typeface="Microsoft YaHei"/>
-                <a:cs typeface="Microsoft YaHei"/>
-              </a:defRPr>
-            </a:pPr>
-            <a:r>
-              <a:rPr sz="1875" b="0">
-                <a:solidFill>
-                  <a:srgbClr val="63788D"/>
-                </a:solidFill>
-                <a:latin typeface="Microsoft YaHei"/>
-                <a:ea typeface="Microsoft YaHei"/>
-                <a:cs typeface="Microsoft YaHei"/>
-              </a:rPr>
-              <a:t>留作课后补充。</a:t>
+              <a:defRPr sz="1300" b="0">
+                <a:solidFill>
+                  <a:srgbClr val="152139"/>
+                </a:solidFill>
+                <a:latin typeface="Microsoft YaHei"/>
+                <a:ea typeface="Microsoft YaHei"/>
+                <a:cs typeface="Microsoft YaHei"/>
+              </a:defRPr>
+            </a:pPr>
+            <a:r>
+              <a:t>真为 1：p 靠近 1</a:t>
+            </a:r>
+          </a:p>
+          <a:p xmlns:a="http://schemas.openxmlformats.org/drawingml/2006/main">
+            <a:pPr>
+              <a:defRPr sz="1300">
+                <a:solidFill>
+                  <a:srgbClr val="152139"/>
+                </a:solidFill>
+                <a:latin typeface="Microsoft YaHei"/>
+              </a:defRPr>
+            </a:pPr>
+            <a:r>
+              <a:t>真为 0：p 靠近 0</a:t>
+            </a:r>
+          </a:p>
+          <a:p xmlns:a="http://schemas.openxmlformats.org/drawingml/2006/main">
+            <a:pPr>
+              <a:defRPr sz="1300">
+                <a:solidFill>
+                  <a:srgbClr val="152139"/>
+                </a:solidFill>
+                <a:latin typeface="Microsoft YaHei"/>
+              </a:defRPr>
+            </a:pPr>
+            <a:r>
+              <a:t>自信地错 → 重罚</a:t>
+            </a:r>
+          </a:p>
+          <a:p xmlns:a="http://schemas.openxmlformats.org/drawingml/2006/main">
+            <a:pPr>
+              <a:defRPr sz="1300">
+                <a:solidFill>
+                  <a:srgbClr val="152139"/>
+                </a:solidFill>
+                <a:latin typeface="Microsoft YaHei"/>
+              </a:defRPr>
+            </a:pPr>
+            <a:r>
+              <a:t>阈值不参与训练</a:t>
             </a:r>
           </a:p>
         </p:txBody>
@@ -12316,7 +11893,7 @@
           <a:lstStyle xmlns:a="http://schemas.openxmlformats.org/drawingml/2006/main"/>
           <a:p xmlns:a="http://schemas.openxmlformats.org/drawingml/2006/main">
             <a:pPr algn="l">
-              <a:defRPr sz="1725" b="1">
+              <a:defRPr sz="1200" b="1">
                 <a:solidFill>
                   <a:srgbClr val="087D88"/>
                 </a:solidFill>
@@ -12326,15 +11903,7 @@
               </a:defRPr>
             </a:pPr>
             <a:r>
-              <a:rPr sz="1725" b="1">
-                <a:solidFill>
-                  <a:srgbClr val="087D88"/>
-                </a:solidFill>
-                <a:latin typeface="Microsoft YaHei"/>
-                <a:ea typeface="Microsoft YaHei"/>
-                <a:cs typeface="Microsoft YaHei"/>
-              </a:rPr>
-              <a:t>后续配图建议</a:t>
+              <a:t>本页要点</a:t>
             </a:r>
           </a:p>
         </p:txBody>
@@ -12373,71 +11942,56 @@
           <a:lstStyle xmlns:a="http://schemas.openxmlformats.org/drawingml/2006/main"/>
           <a:p xmlns:a="http://schemas.openxmlformats.org/drawingml/2006/main">
             <a:pPr algn="l">
-              <a:defRPr sz="1875" b="0">
-                <a:solidFill>
-                  <a:srgbClr val="63788D"/>
-                </a:solidFill>
-                <a:latin typeface="Microsoft YaHei"/>
-                <a:ea typeface="Microsoft YaHei"/>
-                <a:cs typeface="Microsoft YaHei"/>
-              </a:defRPr>
-            </a:pPr>
-            <a:r>
-              <a:rPr sz="1875" b="0">
-                <a:solidFill>
-                  <a:srgbClr val="63788D"/>
-                </a:solidFill>
-                <a:latin typeface="Microsoft YaHei"/>
-                <a:ea typeface="Microsoft YaHei"/>
-                <a:cs typeface="Microsoft YaHei"/>
-              </a:rPr>
-              <a:t>待补：阈值滑块、概率样本带、</a:t>
-            </a:r>
-          </a:p>
-          <a:p xmlns:a="http://schemas.openxmlformats.org/drawingml/2006/main">
-            <a:pPr algn="l">
-              <a:defRPr sz="1875" b="0">
-                <a:solidFill>
-                  <a:srgbClr val="63788D"/>
-                </a:solidFill>
-                <a:latin typeface="Microsoft YaHei"/>
-                <a:ea typeface="Microsoft YaHei"/>
-                <a:cs typeface="Microsoft YaHei"/>
-              </a:defRPr>
-            </a:pPr>
-            <a:r>
-              <a:rPr sz="1875" b="0">
-                <a:solidFill>
-                  <a:srgbClr val="63788D"/>
-                </a:solidFill>
-                <a:latin typeface="Microsoft YaHei"/>
-                <a:ea typeface="Microsoft YaHei"/>
-                <a:cs typeface="Microsoft YaHei"/>
-              </a:rPr>
-              <a:t>带中文含义的混淆矩阵；保留35</a:t>
-            </a:r>
-          </a:p>
-          <a:p xmlns:a="http://schemas.openxmlformats.org/drawingml/2006/main">
-            <a:pPr algn="l">
-              <a:defRPr sz="1875" b="0">
-                <a:solidFill>
-                  <a:srgbClr val="63788D"/>
-                </a:solidFill>
-                <a:latin typeface="Microsoft YaHei"/>
-                <a:ea typeface="Microsoft YaHei"/>
-                <a:cs typeface="Microsoft YaHei"/>
-              </a:defRPr>
-            </a:pPr>
-            <a:r>
-              <a:rPr sz="1875" b="0">
-                <a:solidFill>
-                  <a:srgbClr val="63788D"/>
-                </a:solidFill>
-                <a:latin typeface="Microsoft YaHei"/>
-                <a:ea typeface="Microsoft YaHei"/>
-                <a:cs typeface="Microsoft YaHei"/>
-              </a:rPr>
-              <a:t>秒交互演示。</a:t>
+              <a:defRPr sz="1300" b="0">
+                <a:solidFill>
+                  <a:srgbClr val="152139"/>
+                </a:solidFill>
+                <a:latin typeface="Microsoft YaHei"/>
+                <a:ea typeface="Microsoft YaHei"/>
+                <a:cs typeface="Microsoft YaHei"/>
+              </a:defRPr>
+            </a:pPr>
+            <a:r>
+              <a:t>p ≥ τ → 预测通过</a:t>
+            </a:r>
+          </a:p>
+          <a:p xmlns:a="http://schemas.openxmlformats.org/drawingml/2006/main">
+            <a:pPr>
+              <a:defRPr sz="1300">
+                <a:solidFill>
+                  <a:srgbClr val="152139"/>
+                </a:solidFill>
+                <a:latin typeface="Microsoft YaHei"/>
+              </a:defRPr>
+            </a:pPr>
+            <a:r>
+              <a:t>TP  FP</a:t>
+            </a:r>
+          </a:p>
+          <a:p xmlns:a="http://schemas.openxmlformats.org/drawingml/2006/main">
+            <a:pPr>
+              <a:defRPr sz="1300">
+                <a:solidFill>
+                  <a:srgbClr val="152139"/>
+                </a:solidFill>
+                <a:latin typeface="Microsoft YaHei"/>
+              </a:defRPr>
+            </a:pPr>
+            <a:r>
+              <a:t>FN  TN</a:t>
+            </a:r>
+          </a:p>
+          <a:p xmlns:a="http://schemas.openxmlformats.org/drawingml/2006/main">
+            <a:pPr>
+              <a:defRPr sz="1300">
+                <a:solidFill>
+                  <a:srgbClr val="152139"/>
+                </a:solidFill>
+                <a:latin typeface="Microsoft YaHei"/>
+              </a:defRPr>
+            </a:pPr>
+            <a:r>
+              <a:t>只改 τ，概率不变</a:t>
             </a:r>
           </a:p>
         </p:txBody>
